--- a/sw/report/2026ESWContest_모빌리티_ARTS_결선발표.pptx
+++ b/sw/report/2026ESWContest_모빌리티_ARTS_결선발표.pptx
@@ -649,7 +649,7 @@
           <a:lstStyle/>
           <a:p>
             <a:r>
-              <a:t>[1:10–1:50] 그래서 두 겹으로 막습니다. 1차는 카메라로 미리 보고, 2차는 놓쳤을 때 노면을 재서 제동 시점을 고치고, 그 판단은 메인 컴퓨터와 분리된 안전 섬에서 돕니다. 조향은 운전자 몫입니다.</a:t>
+              <a:t>[1:10–1:50] 그래서 두 겹으로 막습니다. 1차는 카메라로 미리 보고, 2차는 놓쳤을 때 노면을 재서 제동 시점을 고치고, 그 판단은 메인 컴퓨터와 분리된 안전 전용 RTOS에서 돕니다. 조향은 운전자 몫입니다.</a:t>
             </a:r>
           </a:p>
         </p:txBody>
@@ -929,7 +929,7 @@
           <a:lstStyle/>
           <a:p>
             <a:r>
-              <a:t>[6:30–8:30] (시연 ③ 강제 종료) 2차 판단은 안전 섬에서 돕니다. 곡선 빙판에서 파이를 멈추면 2차가 파이에 있을 때 53 km/h, 안전 섬에 있을 때 39 km/h 로 충돌했습니다. 지금 주행 중에 파이 메인 프로그램을 실제로 죽여 보겠습니다. 정직하게 말씀드리면, 이번 확장은 보드가 없어 같은 C 코드를 파이 격리 코어에서 돌렸습니다.</a:t>
+              <a:t>[6:30–8:30] (시연 ③ 강제 종료) 2차 판단은 안전 전용 RTOS에서 돕니다. 곡선 빙판에서 파이를 멈추면 2차가 파이에 있을 때 53 km/h, 안전 전용 RTOS에 있을 때 39 km/h 로 충돌했습니다. 지금 주행 중에 파이 메인 프로그램을 실제로 죽여 보겠습니다. 정직하게 말씀드리면, 이번 확장은 보드가 없어 같은 C 코드를 파이 격리 코어에서 돌렸습니다.</a:t>
             </a:r>
           </a:p>
         </p:txBody>
@@ -5573,7 +5573,7 @@
                 <a:ea typeface="Pretendard"/>
                 <a:cs typeface="Pretendard"/>
               </a:rPr>
-              <a:t>2차 판단은 리눅스와 분리된 안전 섬에서 돈다. 메인 프로그램이 멈춰도 제동 판단은 계속된다.</a:t>
+              <a:t>2차 판단은 리눅스와 분리된 안전 전용 RTOS 에서 돈다. 메인 프로그램이 멈춰도 제동 판단은 계속된다.</a:t>
             </a:r>
           </a:p>
         </p:txBody>
@@ -7699,7 +7699,7 @@
                 <a:ea typeface="Pretendard"/>
                 <a:cs typeface="Pretendard"/>
               </a:rPr>
-              <a:t>RTOS 안전 섬</a:t>
+              <a:t>안전 전용 RTOS</a:t>
             </a:r>
           </a:p>
         </p:txBody>
@@ -7965,7 +7965,7 @@
                 <a:ea typeface="Pretendard"/>
                 <a:cs typeface="Pretendard"/>
               </a:rPr>
-              <a:t>빙판 확인 직후 파이 메인 프로그램을 실제로 강제 종료 → 안전 섬 혼자 4.1 m 앞에 세운다</a:t>
+              <a:t>빙판 확인 직후 파이 메인 프로그램을 실제로 강제 종료 → 격리 코어의 2차 방어가 혼자 4.1 m 앞에 세운다</a:t>
             </a:r>
           </a:p>
         </p:txBody>
@@ -8059,7 +8059,7 @@
                 <a:ea typeface="Pretendard"/>
                 <a:cs typeface="Pretendard"/>
               </a:rPr>
-              <a:t>2차가 파이 → 2차가 안전 섬</a:t>
+              <a:t>2차가 파이 → 2차가 안전 전용 RTOS</a:t>
             </a:r>
           </a:p>
         </p:txBody>
@@ -8463,7 +8463,7 @@
                           <a:ea typeface="Pretendard"/>
                           <a:cs typeface="Pretendard"/>
                         </a:rPr>
-                        <a:t>안전 섬 (격리 코어 · 실시간)</a:t>
+                        <a:t>파이 격리 코어 (실시간 · RTOS 대체)</a:t>
                       </a:r>
                       <a:endParaRPr sz="1200"/>
                     </a:p>
@@ -9326,7 +9326,7 @@
                 <a:ea typeface="Pretendard"/>
                 <a:cs typeface="Pretendard"/>
               </a:rPr>
-              <a:t>메인 컴퓨터가 멈춰도 안전 섬이 계속 — 충돌 53 → 39 km/h</a:t>
+              <a:t>메인 컴퓨터가 멈춰도 2차 방어는 계속 — 충돌 53 → 39 km/h</a:t>
             </a:r>
           </a:p>
         </p:txBody>

--- a/sw/report/2026ESWContest_모빌리티_ARTS_결선발표.pptx
+++ b/sw/report/2026ESWContest_모빌리티_ARTS_결선발표.pptx
@@ -719,7 +719,7 @@
           <a:lstStyle/>
           <a:p>
             <a:r>
-              <a:t>[1:50–3:00] (시연 ① RealSense) 실사진 69,358장을 보드에 넣어 블랙아이스 96.6 % 를 경보했고 마른 노면 오경보는 0.3 % 입니다. 지금 RealSense 로 빙판 사진을 비추면 실시간으로 경고가 뜹니다.</a:t>
+              <a:t>[1:50–3:10] (시연 ① — venue_desktop.sh first) 실사진 69,358장을 보드에 넣어 블랙아이스 96.6 % 를 경보했고 마른 노면 오경보는 0.3 % 입니다. 지금 차가 80 km/h 로 달립니다. 화면 아래 '빙판까지 ○ m'가 150 m 이상일 때 RealSense 에 블랙아이스 사진을 비추면 — 경고, 빙판 앞 정지. (시간이 되면) 마른 노면 사진으로 한 판 더: 경고 없이 그대로 빙판에 들어가 충돌. 제동 여부는 RealSense 판정 하나로만 정합니다.</a:t>
             </a:r>
           </a:p>
         </p:txBody>
@@ -789,7 +789,7 @@
           <a:lstStyle/>
           <a:p>
             <a:r>
-              <a:t>[3:00–5:30] (시연 ② Moza) 카메라가 놓치면 2차 방어가 브레이크를 0.4 초 살짝 밟아 마찰을 잽니다. 빙판은 감속이 거기서 막히고 그 값이 마찰입니다. 그 마찰로 정지 거리를 다시 계산해 20 ms 마다 제동 시점을 정합니다. 직접 운전해 보겠습니다 — 2차 방어를 끄면 평소처럼 밟아도 미끄러져 충돌하고, 켜면 탭과 경고 뒤 필요한 순간 시스템이 밟아 섭니다.</a:t>
+              <a:t>[3:10–5:40] (시연 ② — venue_desktop.sh assist, D 로 OFF/ON) 카메라가 놓치면 2차 방어가 브레이크를 0.4 초 살짝 밟아 마찰을 잽니다. 빙판은 감속이 거기서 막히고 그 값이 마찰입니다. 그 마찰로 정지 거리를 다시 계산해 20 ms 마다 제동 시점을 정합니다. 먼저 말씀드립니다 — 같은 조건에서 비교하려고 회피 조향은 매번 똑같이 자동으로 넣었고, 브레이크는 제가 직접 밟습니다. 우리 시스템은 조향에 개입하지 않고 제동 시점만 바꿉니다. OFF: 빨간 선에서 밟고 피해도 빙판에서 미끄러져 충돌(연습 17 km/h). ON: 탭 → 진동·경고 → 미리 감속 → 같은 지점에서 밟고 피하면 정지(연습 34 m 앞).</a:t>
             </a:r>
           </a:p>
         </p:txBody>
@@ -929,7 +929,7 @@
           <a:lstStyle/>
           <a:p>
             <a:r>
-              <a:t>[6:30–8:30] (시연 ③ 강제 종료) 2차 판단은 안전 전용 RTOS에서 돕니다. 곡선 빙판에서 파이를 멈추면 2차가 파이에 있을 때 53 km/h, 안전 전용 RTOS에 있을 때 39 km/h 로 충돌했습니다. 지금 주행 중에 파이 메인 프로그램을 실제로 죽여 보겠습니다. 정직하게 말씀드리면, 이번 확장은 보드가 없어 같은 C 코드를 파이 격리 코어에서 돌렸습니다.</a:t>
+              <a:t>[6:30–8:30] (시연 ③ — ② 의 ON 주행 중 빙판 경고 뒤 K 키) 2차 판단은 안전 전용 RTOS에서 돕니다. 곡선 빙판에서 파이를 멈추면 2차가 파이에 있을 때 53 km/h, 안전 전용 RTOS에 있을 때 39 km/h 로 충돌했습니다. 지금 주행 중에 파이 메인 프로그램을 실제로 죽여 보겠습니다. 정직하게 말씀드리면, 이번 확장은 보드가 없어 같은 C 코드를 파이 격리 코어에서 돌렸습니다.</a:t>
             </a:r>
           </a:p>
         </p:txBody>
@@ -5894,7 +5894,7 @@
       </p:sp>
       <p:pic>
         <p:nvPicPr>
-          <p:cNvPr id="8" name="Picture 7" descr="demo_primary.jpg"/>
+          <p:cNvPr id="8" name="Picture 7" descr="demo_res_1st.jpg"/>
           <p:cNvPicPr>
             <a:picLocks noChangeAspect="1"/>
           </p:cNvPicPr>
@@ -5909,7 +5909,7 @@
         <p:spPr>
           <a:xfrm>
             <a:off x="609600" y="1238250"/>
-            <a:ext cx="5334000" cy="4171950"/>
+            <a:ext cx="5334000" cy="3000375"/>
           </a:xfrm>
           <a:prstGeom prst="rect">
             <a:avLst/>
@@ -5924,8 +5924,8 @@
         </p:nvSpPr>
         <p:spPr>
           <a:xfrm>
-            <a:off x="609600" y="5467350"/>
-            <a:ext cx="5334000" cy="190500"/>
+            <a:off x="609600" y="4295775"/>
+            <a:ext cx="5334000" cy="342900"/>
           </a:xfrm>
           <a:prstGeom prst="rect">
             <a:avLst/>
@@ -5940,7 +5940,7 @@
           <a:p>
             <a:pPr algn="l">
               <a:lnSpc>
-                <a:spcPct val="140000"/>
+                <a:spcPct val="130000"/>
               </a:lnSpc>
             </a:pPr>
             <a:r>
@@ -5952,7 +5952,7 @@
                 <a:ea typeface="Pretendard"/>
                 <a:cs typeface="Pretendard"/>
               </a:rPr>
-              <a:t>RealSense 로 빙판 사진을 비추면 실시간으로 판정·경고한다</a:t>
+              <a:t>RealSense 가 빙판 사진을 보면 CARLA 차가 빙판 앞에 선다 — 제동 여부는 RealSense 판정만으로 정한다</a:t>
             </a:r>
           </a:p>
         </p:txBody>
@@ -5965,8 +5965,8 @@
         </p:nvSpPr>
         <p:spPr>
           <a:xfrm>
-            <a:off x="6324600" y="1333500"/>
-            <a:ext cx="2571750" cy="591502"/>
+            <a:off x="609600" y="4762500"/>
+            <a:ext cx="2571750" cy="385762"/>
           </a:xfrm>
           <a:prstGeom prst="rect">
             <a:avLst/>
@@ -5985,7 +5985,7 @@
               </a:lnSpc>
             </a:pPr>
             <a:r>
-              <a:rPr sz="4600" b="0">
+              <a:rPr sz="3000" b="0">
                 <a:solidFill>
                   <a:srgbClr val="00AAD2"/>
                 </a:solidFill>
@@ -5993,7 +5993,7 @@
                 <a:ea typeface="Pretendard ExtraBold"/>
                 <a:cs typeface="Pretendard ExtraBold"/>
               </a:rPr>
-              <a:t>96.6 %</a:t>
+              <a:t>빙판 앞 정지</a:t>
             </a:r>
           </a:p>
         </p:txBody>
@@ -6006,8 +6006,8 @@
         </p:nvSpPr>
         <p:spPr>
           <a:xfrm>
-            <a:off x="6324600" y="1944052"/>
-            <a:ext cx="2571750" cy="532448"/>
+            <a:off x="609600" y="5167312"/>
+            <a:ext cx="2571750" cy="547688"/>
           </a:xfrm>
           <a:prstGeom prst="rect">
             <a:avLst/>
@@ -6034,7 +6034,7 @@
                 <a:ea typeface="Pretendard"/>
                 <a:cs typeface="Pretendard"/>
               </a:rPr>
-              <a:t>블랙아이스 실사진 6,340장</a:t>
+              <a:t>블랙아이스 사진 → 감지 즉시 제동</a:t>
             </a:r>
             <a:br/>
             <a:r>
@@ -6046,7 +6046,7 @@
                 <a:ea typeface="Pretendard"/>
                 <a:cs typeface="Pretendard"/>
               </a:rPr>
-              <a:t>경보율</a:t>
+              <a:t>(영상 7.9 m · 연습 31.6 m 앞)</a:t>
             </a:r>
           </a:p>
         </p:txBody>
@@ -6059,8 +6059,8 @@
         </p:nvSpPr>
         <p:spPr>
           <a:xfrm>
-            <a:off x="9086850" y="1333500"/>
-            <a:ext cx="2571750" cy="591502"/>
+            <a:off x="3371850" y="4762500"/>
+            <a:ext cx="2571750" cy="385762"/>
           </a:xfrm>
           <a:prstGeom prst="rect">
             <a:avLst/>
@@ -6079,7 +6079,7 @@
               </a:lnSpc>
             </a:pPr>
             <a:r>
-              <a:rPr sz="4600" b="0">
+              <a:rPr sz="3000" b="0">
                 <a:solidFill>
                   <a:srgbClr val="002C5F"/>
                 </a:solidFill>
@@ -6087,7 +6087,7 @@
                 <a:ea typeface="Pretendard ExtraBold"/>
                 <a:cs typeface="Pretendard ExtraBold"/>
               </a:rPr>
-              <a:t>0.3 %</a:t>
+              <a:t>경고 0</a:t>
             </a:r>
           </a:p>
         </p:txBody>
@@ -6100,8 +6100,8 @@
         </p:nvSpPr>
         <p:spPr>
           <a:xfrm>
-            <a:off x="9086850" y="1944052"/>
-            <a:ext cx="2571750" cy="532448"/>
+            <a:off x="3371850" y="5167312"/>
+            <a:ext cx="2571750" cy="547688"/>
           </a:xfrm>
           <a:prstGeom prst="rect">
             <a:avLst/>
@@ -6128,7 +6128,7 @@
                 <a:ea typeface="Pretendard"/>
                 <a:cs typeface="Pretendard"/>
               </a:rPr>
-              <a:t>마른 노면 19,018장</a:t>
+              <a:t>마른 노면 사진 → 그대로 진행</a:t>
             </a:r>
             <a:br/>
             <a:r>
@@ -6140,6 +6140,194 @@
                 <a:ea typeface="Pretendard"/>
                 <a:cs typeface="Pretendard"/>
               </a:rPr>
+              <a:t>(빙판에서 충돌)</a:t>
+            </a:r>
+          </a:p>
+        </p:txBody>
+      </p:sp>
+      <p:sp>
+        <p:nvSpPr>
+          <p:cNvPr id="14" name="TextBox 13"/>
+          <p:cNvSpPr txBox="1"/>
+          <p:nvPr/>
+        </p:nvSpPr>
+        <p:spPr>
+          <a:xfrm>
+            <a:off x="6324600" y="1333500"/>
+            <a:ext cx="2571750" cy="591502"/>
+          </a:xfrm>
+          <a:prstGeom prst="rect">
+            <a:avLst/>
+          </a:prstGeom>
+          <a:noFill/>
+        </p:spPr>
+        <p:txBody>
+          <a:bodyPr wrap="square" anchor="t" lIns="0" rIns="0" tIns="0" bIns="0">
+            <a:spAutoFit/>
+          </a:bodyPr>
+          <a:lstStyle/>
+          <a:p>
+            <a:pPr algn="l">
+              <a:lnSpc>
+                <a:spcPct val="100000"/>
+              </a:lnSpc>
+            </a:pPr>
+            <a:r>
+              <a:rPr sz="4600" b="0">
+                <a:solidFill>
+                  <a:srgbClr val="00AAD2"/>
+                </a:solidFill>
+                <a:latin typeface="Pretendard ExtraBold"/>
+                <a:ea typeface="Pretendard ExtraBold"/>
+                <a:cs typeface="Pretendard ExtraBold"/>
+              </a:rPr>
+              <a:t>96.6 %</a:t>
+            </a:r>
+          </a:p>
+        </p:txBody>
+      </p:sp>
+      <p:sp>
+        <p:nvSpPr>
+          <p:cNvPr id="15" name="TextBox 14"/>
+          <p:cNvSpPr txBox="1"/>
+          <p:nvPr/>
+        </p:nvSpPr>
+        <p:spPr>
+          <a:xfrm>
+            <a:off x="6324600" y="1944052"/>
+            <a:ext cx="2571750" cy="532448"/>
+          </a:xfrm>
+          <a:prstGeom prst="rect">
+            <a:avLst/>
+          </a:prstGeom>
+          <a:noFill/>
+        </p:spPr>
+        <p:txBody>
+          <a:bodyPr wrap="square" anchor="t" lIns="0" rIns="0" tIns="0" bIns="0">
+            <a:spAutoFit/>
+          </a:bodyPr>
+          <a:lstStyle/>
+          <a:p>
+            <a:pPr algn="l">
+              <a:lnSpc>
+                <a:spcPct val="130000"/>
+              </a:lnSpc>
+            </a:pPr>
+            <a:r>
+              <a:rPr sz="950" b="0">
+                <a:solidFill>
+                  <a:srgbClr val="767676"/>
+                </a:solidFill>
+                <a:latin typeface="Pretendard"/>
+                <a:ea typeface="Pretendard"/>
+                <a:cs typeface="Pretendard"/>
+              </a:rPr>
+              <a:t>블랙아이스 실사진 6,340장</a:t>
+            </a:r>
+            <a:br/>
+            <a:r>
+              <a:rPr sz="950" b="0">
+                <a:solidFill>
+                  <a:srgbClr val="767676"/>
+                </a:solidFill>
+                <a:latin typeface="Pretendard"/>
+                <a:ea typeface="Pretendard"/>
+                <a:cs typeface="Pretendard"/>
+              </a:rPr>
+              <a:t>경보율</a:t>
+            </a:r>
+          </a:p>
+        </p:txBody>
+      </p:sp>
+      <p:sp>
+        <p:nvSpPr>
+          <p:cNvPr id="16" name="TextBox 15"/>
+          <p:cNvSpPr txBox="1"/>
+          <p:nvPr/>
+        </p:nvSpPr>
+        <p:spPr>
+          <a:xfrm>
+            <a:off x="9086850" y="1333500"/>
+            <a:ext cx="2571750" cy="591502"/>
+          </a:xfrm>
+          <a:prstGeom prst="rect">
+            <a:avLst/>
+          </a:prstGeom>
+          <a:noFill/>
+        </p:spPr>
+        <p:txBody>
+          <a:bodyPr wrap="square" anchor="t" lIns="0" rIns="0" tIns="0" bIns="0">
+            <a:spAutoFit/>
+          </a:bodyPr>
+          <a:lstStyle/>
+          <a:p>
+            <a:pPr algn="l">
+              <a:lnSpc>
+                <a:spcPct val="100000"/>
+              </a:lnSpc>
+            </a:pPr>
+            <a:r>
+              <a:rPr sz="4600" b="0">
+                <a:solidFill>
+                  <a:srgbClr val="002C5F"/>
+                </a:solidFill>
+                <a:latin typeface="Pretendard ExtraBold"/>
+                <a:ea typeface="Pretendard ExtraBold"/>
+                <a:cs typeface="Pretendard ExtraBold"/>
+              </a:rPr>
+              <a:t>0.3 %</a:t>
+            </a:r>
+          </a:p>
+        </p:txBody>
+      </p:sp>
+      <p:sp>
+        <p:nvSpPr>
+          <p:cNvPr id="17" name="TextBox 16"/>
+          <p:cNvSpPr txBox="1"/>
+          <p:nvPr/>
+        </p:nvSpPr>
+        <p:spPr>
+          <a:xfrm>
+            <a:off x="9086850" y="1944052"/>
+            <a:ext cx="2571750" cy="532448"/>
+          </a:xfrm>
+          <a:prstGeom prst="rect">
+            <a:avLst/>
+          </a:prstGeom>
+          <a:noFill/>
+        </p:spPr>
+        <p:txBody>
+          <a:bodyPr wrap="square" anchor="t" lIns="0" rIns="0" tIns="0" bIns="0">
+            <a:spAutoFit/>
+          </a:bodyPr>
+          <a:lstStyle/>
+          <a:p>
+            <a:pPr algn="l">
+              <a:lnSpc>
+                <a:spcPct val="130000"/>
+              </a:lnSpc>
+            </a:pPr>
+            <a:r>
+              <a:rPr sz="950" b="0">
+                <a:solidFill>
+                  <a:srgbClr val="767676"/>
+                </a:solidFill>
+                <a:latin typeface="Pretendard"/>
+                <a:ea typeface="Pretendard"/>
+                <a:cs typeface="Pretendard"/>
+              </a:rPr>
+              <a:t>마른 노면 19,018장</a:t>
+            </a:r>
+            <a:br/>
+            <a:r>
+              <a:rPr sz="950" b="0">
+                <a:solidFill>
+                  <a:srgbClr val="767676"/>
+                </a:solidFill>
+                <a:latin typeface="Pretendard"/>
+                <a:ea typeface="Pretendard"/>
+                <a:cs typeface="Pretendard"/>
+              </a:rPr>
               <a:t>오경보율 (젖은 노면 0.8 %)</a:t>
             </a:r>
           </a:p>
@@ -6147,7 +6335,7 @@
       </p:sp>
       <p:sp>
         <p:nvSpPr>
-          <p:cNvPr id="14" name="Rectangle 13"/>
+          <p:cNvPr id="18" name="Rectangle 17"/>
           <p:cNvSpPr/>
           <p:nvPr/>
         </p:nvSpPr>
@@ -6175,7 +6363,7 @@
       </p:sp>
       <p:sp>
         <p:nvSpPr>
-          <p:cNvPr id="15" name="TextBox 14"/>
+          <p:cNvPr id="19" name="TextBox 18"/>
           <p:cNvSpPr txBox="1"/>
           <p:nvPr/>
         </p:nvSpPr>
@@ -6216,7 +6404,7 @@
       </p:sp>
       <p:sp>
         <p:nvSpPr>
-          <p:cNvPr id="16" name="TextBox 15"/>
+          <p:cNvPr id="20" name="TextBox 19"/>
           <p:cNvSpPr txBox="1"/>
           <p:nvPr/>
         </p:nvSpPr>
@@ -6915,7 +7103,7 @@
         </p:blipFill>
         <p:spPr>
           <a:xfrm>
-            <a:off x="6705600" y="1439528"/>
+            <a:off x="6705600" y="1296653"/>
             <a:ext cx="4876800" cy="2502568"/>
           </a:xfrm>
           <a:prstGeom prst="rect">
@@ -6931,7 +7119,7 @@
         </p:nvSpPr>
         <p:spPr>
           <a:xfrm>
-            <a:off x="6705600" y="4191000"/>
+            <a:off x="6705600" y="3905250"/>
             <a:ext cx="4876800" cy="190500"/>
           </a:xfrm>
           <a:prstGeom prst="rect">
@@ -6964,34 +7152,426 @@
           </a:p>
         </p:txBody>
       </p:sp>
-      <p:sp>
-        <p:nvSpPr>
-          <p:cNvPr id="19" name="Rectangle 18"/>
-          <p:cNvSpPr/>
-          <p:nvPr/>
-        </p:nvSpPr>
-        <p:spPr>
-          <a:xfrm>
-            <a:off x="6705600" y="4572000"/>
-            <a:ext cx="4876800" cy="1143000"/>
-          </a:xfrm>
-          <a:prstGeom prst="rect">
-            <a:avLst/>
-          </a:prstGeom>
-          <a:solidFill>
-            <a:srgbClr val="002C5F"/>
-          </a:solidFill>
-          <a:ln>
-            <a:noFill/>
-          </a:ln>
-          <a:effectLst/>
-        </p:spPr>
-        <p:txBody>
-          <a:bodyPr rtlCol="0" anchor="ctr"/>
-          <a:lstStyle/>
-          <a:p/>
-        </p:txBody>
-      </p:sp>
+      <p:graphicFrame>
+        <p:nvGraphicFramePr>
+          <p:cNvPr id="19" name="Table 18"/>
+          <p:cNvGraphicFramePr>
+            <a:graphicFrameLocks noGrp="1"/>
+          </p:cNvGraphicFramePr>
+          <p:nvPr/>
+        </p:nvGraphicFramePr>
+        <p:xfrm>
+          <a:off x="6705600" y="4400550"/>
+          <a:ext cx="4876800" cy="971550"/>
+        </p:xfrm>
+        <a:graphic>
+          <a:graphicData uri="http://schemas.openxmlformats.org/drawingml/2006/table">
+            <a:tbl>
+              <a:tblPr>
+                <a:tableStyleId>{2D5ABB26-0587-4C30-8999-92F81FD0307C}</a:tableStyleId>
+              </a:tblPr>
+              <a:tblGrid>
+                <a:gridCol w="2608521"/>
+                <a:gridCol w="1020726"/>
+                <a:gridCol w="1247553"/>
+              </a:tblGrid>
+              <a:tr h="285750">
+                <a:tc>
+                  <a:txBody>
+                    <a:bodyPr wrap="square"/>
+                    <a:lstStyle/>
+                    <a:p>
+                      <a:pPr>
+                        <a:lnSpc>
+                          <a:spcPct val="122000"/>
+                        </a:lnSpc>
+                      </a:pPr>
+                      <a:r>
+                        <a:rPr sz="1150" b="1">
+                          <a:solidFill>
+                            <a:srgbClr val="002C5F"/>
+                          </a:solidFill>
+                          <a:latin typeface="Pretendard"/>
+                          <a:ea typeface="Pretendard"/>
+                          <a:cs typeface="Pretendard"/>
+                        </a:rPr>
+                        <a:t>시연: 같은 지점(앞차 65 m)에서 브레이크 + 회피</a:t>
+                      </a:r>
+                      <a:endParaRPr sz="1150"/>
+                    </a:p>
+                  </a:txBody>
+                  <a:tcPr marL="76200" marR="57150" marT="28575" marB="28575" anchor="ctr">
+                    <a:lnL w="9525" cap="flat" cmpd="sng" algn="ctr">
+                      <a:noFill/>
+                    </a:lnL>
+                    <a:lnR w="9525" cap="flat" cmpd="sng" algn="ctr">
+                      <a:noFill/>
+                    </a:lnR>
+                    <a:lnT w="9525" cap="flat" cmpd="sng" algn="ctr">
+                      <a:noFill/>
+                    </a:lnT>
+                    <a:lnB w="15875" cap="flat" cmpd="sng" algn="ctr">
+                      <a:solidFill>
+                        <a:srgbClr val="002C5F"/>
+                      </a:solidFill>
+                      <a:prstDash val="solid"/>
+                    </a:lnB>
+                    <a:noFill/>
+                  </a:tcPr>
+                </a:tc>
+                <a:tc>
+                  <a:txBody>
+                    <a:bodyPr wrap="square"/>
+                    <a:lstStyle/>
+                    <a:p>
+                      <a:pPr>
+                        <a:lnSpc>
+                          <a:spcPct val="122000"/>
+                        </a:lnSpc>
+                      </a:pPr>
+                      <a:r>
+                        <a:rPr sz="1150" b="1">
+                          <a:solidFill>
+                            <a:srgbClr val="002C5F"/>
+                          </a:solidFill>
+                          <a:latin typeface="Pretendard"/>
+                          <a:ea typeface="Pretendard"/>
+                          <a:cs typeface="Pretendard"/>
+                        </a:rPr>
+                        <a:t>그때 속도</a:t>
+                      </a:r>
+                      <a:endParaRPr sz="1150"/>
+                    </a:p>
+                  </a:txBody>
+                  <a:tcPr marL="76200" marR="57150" marT="28575" marB="28575" anchor="ctr">
+                    <a:lnL w="9525" cap="flat" cmpd="sng" algn="ctr">
+                      <a:noFill/>
+                    </a:lnL>
+                    <a:lnR w="9525" cap="flat" cmpd="sng" algn="ctr">
+                      <a:noFill/>
+                    </a:lnR>
+                    <a:lnT w="9525" cap="flat" cmpd="sng" algn="ctr">
+                      <a:noFill/>
+                    </a:lnT>
+                    <a:lnB w="15875" cap="flat" cmpd="sng" algn="ctr">
+                      <a:solidFill>
+                        <a:srgbClr val="002C5F"/>
+                      </a:solidFill>
+                      <a:prstDash val="solid"/>
+                    </a:lnB>
+                    <a:noFill/>
+                  </a:tcPr>
+                </a:tc>
+                <a:tc>
+                  <a:txBody>
+                    <a:bodyPr wrap="square"/>
+                    <a:lstStyle/>
+                    <a:p>
+                      <a:pPr>
+                        <a:lnSpc>
+                          <a:spcPct val="122000"/>
+                        </a:lnSpc>
+                      </a:pPr>
+                      <a:r>
+                        <a:rPr sz="1150" b="1">
+                          <a:solidFill>
+                            <a:srgbClr val="002C5F"/>
+                          </a:solidFill>
+                          <a:latin typeface="Pretendard"/>
+                          <a:ea typeface="Pretendard"/>
+                          <a:cs typeface="Pretendard"/>
+                        </a:rPr>
+                        <a:t>결과</a:t>
+                      </a:r>
+                      <a:endParaRPr sz="1150"/>
+                    </a:p>
+                  </a:txBody>
+                  <a:tcPr marL="76200" marR="57150" marT="28575" marB="28575" anchor="ctr">
+                    <a:lnL w="9525" cap="flat" cmpd="sng" algn="ctr">
+                      <a:noFill/>
+                    </a:lnL>
+                    <a:lnR w="9525" cap="flat" cmpd="sng" algn="ctr">
+                      <a:noFill/>
+                    </a:lnR>
+                    <a:lnT w="9525" cap="flat" cmpd="sng" algn="ctr">
+                      <a:noFill/>
+                    </a:lnT>
+                    <a:lnB w="15875" cap="flat" cmpd="sng" algn="ctr">
+                      <a:solidFill>
+                        <a:srgbClr val="002C5F"/>
+                      </a:solidFill>
+                      <a:prstDash val="solid"/>
+                    </a:lnB>
+                    <a:noFill/>
+                  </a:tcPr>
+                </a:tc>
+              </a:tr>
+              <a:tr h="342900">
+                <a:tc>
+                  <a:txBody>
+                    <a:bodyPr wrap="square"/>
+                    <a:lstStyle/>
+                    <a:p>
+                      <a:pPr>
+                        <a:lnSpc>
+                          <a:spcPct val="122000"/>
+                        </a:lnSpc>
+                      </a:pPr>
+                      <a:r>
+                        <a:rPr sz="1200" b="1">
+                          <a:solidFill>
+                            <a:srgbClr val="E63312"/>
+                          </a:solidFill>
+                          <a:latin typeface="Pretendard"/>
+                          <a:ea typeface="Pretendard"/>
+                          <a:cs typeface="Pretendard"/>
+                        </a:rPr>
+                        <a:t>2차 방어 OFF — 지금 차</a:t>
+                      </a:r>
+                      <a:endParaRPr sz="1200"/>
+                    </a:p>
+                  </a:txBody>
+                  <a:tcPr marL="76200" marR="57150" marT="28575" marB="28575" anchor="ctr">
+                    <a:lnL w="9525" cap="flat" cmpd="sng" algn="ctr">
+                      <a:noFill/>
+                    </a:lnL>
+                    <a:lnR w="9525" cap="flat" cmpd="sng" algn="ctr">
+                      <a:noFill/>
+                    </a:lnR>
+                    <a:lnT w="9525" cap="flat" cmpd="sng" algn="ctr">
+                      <a:noFill/>
+                    </a:lnT>
+                    <a:lnB w="9525" cap="flat" cmpd="sng" algn="ctr">
+                      <a:solidFill>
+                        <a:srgbClr val="E0DCD8"/>
+                      </a:solidFill>
+                      <a:prstDash val="solid"/>
+                    </a:lnB>
+                    <a:noFill/>
+                  </a:tcPr>
+                </a:tc>
+                <a:tc>
+                  <a:txBody>
+                    <a:bodyPr wrap="square"/>
+                    <a:lstStyle/>
+                    <a:p>
+                      <a:pPr>
+                        <a:lnSpc>
+                          <a:spcPct val="122000"/>
+                        </a:lnSpc>
+                      </a:pPr>
+                      <a:r>
+                        <a:rPr sz="1200" b="0">
+                          <a:solidFill>
+                            <a:srgbClr val="1C1B1B"/>
+                          </a:solidFill>
+                          <a:latin typeface="Pretendard"/>
+                          <a:ea typeface="Pretendard"/>
+                          <a:cs typeface="Pretendard"/>
+                        </a:rPr>
+                        <a:t>66 km/h</a:t>
+                      </a:r>
+                      <a:endParaRPr sz="1200"/>
+                    </a:p>
+                  </a:txBody>
+                  <a:tcPr marL="76200" marR="57150" marT="28575" marB="28575" anchor="ctr">
+                    <a:lnL w="9525" cap="flat" cmpd="sng" algn="ctr">
+                      <a:noFill/>
+                    </a:lnL>
+                    <a:lnR w="9525" cap="flat" cmpd="sng" algn="ctr">
+                      <a:noFill/>
+                    </a:lnR>
+                    <a:lnT w="9525" cap="flat" cmpd="sng" algn="ctr">
+                      <a:noFill/>
+                    </a:lnT>
+                    <a:lnB w="9525" cap="flat" cmpd="sng" algn="ctr">
+                      <a:solidFill>
+                        <a:srgbClr val="E0DCD8"/>
+                      </a:solidFill>
+                      <a:prstDash val="solid"/>
+                    </a:lnB>
+                    <a:noFill/>
+                  </a:tcPr>
+                </a:tc>
+                <a:tc>
+                  <a:txBody>
+                    <a:bodyPr wrap="square"/>
+                    <a:lstStyle/>
+                    <a:p>
+                      <a:pPr>
+                        <a:lnSpc>
+                          <a:spcPct val="122000"/>
+                        </a:lnSpc>
+                      </a:pPr>
+                      <a:r>
+                        <a:rPr sz="1200" b="1">
+                          <a:solidFill>
+                            <a:srgbClr val="E63312"/>
+                          </a:solidFill>
+                          <a:latin typeface="Pretendard"/>
+                          <a:ea typeface="Pretendard"/>
+                          <a:cs typeface="Pretendard"/>
+                        </a:rPr>
+                        <a:t>17 km/h 충돌</a:t>
+                      </a:r>
+                      <a:endParaRPr sz="1200"/>
+                    </a:p>
+                  </a:txBody>
+                  <a:tcPr marL="76200" marR="57150" marT="28575" marB="28575" anchor="ctr">
+                    <a:lnL w="9525" cap="flat" cmpd="sng" algn="ctr">
+                      <a:noFill/>
+                    </a:lnL>
+                    <a:lnR w="9525" cap="flat" cmpd="sng" algn="ctr">
+                      <a:noFill/>
+                    </a:lnR>
+                    <a:lnT w="9525" cap="flat" cmpd="sng" algn="ctr">
+                      <a:noFill/>
+                    </a:lnT>
+                    <a:lnB w="9525" cap="flat" cmpd="sng" algn="ctr">
+                      <a:solidFill>
+                        <a:srgbClr val="E0DCD8"/>
+                      </a:solidFill>
+                      <a:prstDash val="solid"/>
+                    </a:lnB>
+                    <a:noFill/>
+                  </a:tcPr>
+                </a:tc>
+              </a:tr>
+              <a:tr h="342900">
+                <a:tc>
+                  <a:txBody>
+                    <a:bodyPr wrap="square"/>
+                    <a:lstStyle/>
+                    <a:p>
+                      <a:pPr>
+                        <a:lnSpc>
+                          <a:spcPct val="122000"/>
+                        </a:lnSpc>
+                      </a:pPr>
+                      <a:r>
+                        <a:rPr sz="1200" b="1">
+                          <a:solidFill>
+                            <a:srgbClr val="E63312"/>
+                          </a:solidFill>
+                          <a:latin typeface="Pretendard"/>
+                          <a:ea typeface="Pretendard"/>
+                          <a:cs typeface="Pretendard"/>
+                        </a:rPr>
+                        <a:t>2차 방어 ON — 미리 감속</a:t>
+                      </a:r>
+                      <a:endParaRPr sz="1200"/>
+                    </a:p>
+                  </a:txBody>
+                  <a:tcPr marL="76200" marR="57150" marT="28575" marB="28575" anchor="ctr">
+                    <a:lnL w="9525" cap="flat" cmpd="sng" algn="ctr">
+                      <a:noFill/>
+                    </a:lnL>
+                    <a:lnR w="9525" cap="flat" cmpd="sng" algn="ctr">
+                      <a:noFill/>
+                    </a:lnR>
+                    <a:lnT w="9525" cap="flat" cmpd="sng" algn="ctr">
+                      <a:noFill/>
+                    </a:lnT>
+                    <a:lnB w="9525" cap="flat" cmpd="sng" algn="ctr">
+                      <a:solidFill>
+                        <a:srgbClr val="E0DCD8"/>
+                      </a:solidFill>
+                      <a:prstDash val="solid"/>
+                    </a:lnB>
+                    <a:noFill/>
+                  </a:tcPr>
+                </a:tc>
+                <a:tc>
+                  <a:txBody>
+                    <a:bodyPr wrap="square"/>
+                    <a:lstStyle/>
+                    <a:p>
+                      <a:pPr>
+                        <a:lnSpc>
+                          <a:spcPct val="122000"/>
+                        </a:lnSpc>
+                      </a:pPr>
+                      <a:r>
+                        <a:rPr sz="1200" b="0">
+                          <a:solidFill>
+                            <a:srgbClr val="1C1B1B"/>
+                          </a:solidFill>
+                          <a:latin typeface="Pretendard"/>
+                          <a:ea typeface="Pretendard"/>
+                          <a:cs typeface="Pretendard"/>
+                        </a:rPr>
+                        <a:t>40 km/h</a:t>
+                      </a:r>
+                      <a:endParaRPr sz="1200"/>
+                    </a:p>
+                  </a:txBody>
+                  <a:tcPr marL="76200" marR="57150" marT="28575" marB="28575" anchor="ctr">
+                    <a:lnL w="9525" cap="flat" cmpd="sng" algn="ctr">
+                      <a:noFill/>
+                    </a:lnL>
+                    <a:lnR w="9525" cap="flat" cmpd="sng" algn="ctr">
+                      <a:noFill/>
+                    </a:lnR>
+                    <a:lnT w="9525" cap="flat" cmpd="sng" algn="ctr">
+                      <a:noFill/>
+                    </a:lnT>
+                    <a:lnB w="9525" cap="flat" cmpd="sng" algn="ctr">
+                      <a:solidFill>
+                        <a:srgbClr val="E0DCD8"/>
+                      </a:solidFill>
+                      <a:prstDash val="solid"/>
+                    </a:lnB>
+                    <a:noFill/>
+                  </a:tcPr>
+                </a:tc>
+                <a:tc>
+                  <a:txBody>
+                    <a:bodyPr wrap="square"/>
+                    <a:lstStyle/>
+                    <a:p>
+                      <a:pPr>
+                        <a:lnSpc>
+                          <a:spcPct val="122000"/>
+                        </a:lnSpc>
+                      </a:pPr>
+                      <a:r>
+                        <a:rPr sz="1200" b="1">
+                          <a:solidFill>
+                            <a:srgbClr val="1E8A4C"/>
+                          </a:solidFill>
+                          <a:latin typeface="Pretendard"/>
+                          <a:ea typeface="Pretendard"/>
+                          <a:cs typeface="Pretendard"/>
+                        </a:rPr>
+                        <a:t>34 m 앞 정지</a:t>
+                      </a:r>
+                      <a:endParaRPr sz="1200"/>
+                    </a:p>
+                  </a:txBody>
+                  <a:tcPr marL="76200" marR="57150" marT="28575" marB="28575" anchor="ctr">
+                    <a:lnL w="9525" cap="flat" cmpd="sng" algn="ctr">
+                      <a:noFill/>
+                    </a:lnL>
+                    <a:lnR w="9525" cap="flat" cmpd="sng" algn="ctr">
+                      <a:noFill/>
+                    </a:lnR>
+                    <a:lnT w="9525" cap="flat" cmpd="sng" algn="ctr">
+                      <a:noFill/>
+                    </a:lnT>
+                    <a:lnB w="9525" cap="flat" cmpd="sng" algn="ctr">
+                      <a:solidFill>
+                        <a:srgbClr val="E0DCD8"/>
+                      </a:solidFill>
+                      <a:prstDash val="solid"/>
+                    </a:lnB>
+                    <a:noFill/>
+                  </a:tcPr>
+                </a:tc>
+              </a:tr>
+            </a:tbl>
+          </a:graphicData>
+        </a:graphic>
+      </p:graphicFrame>
       <p:sp>
         <p:nvSpPr>
           <p:cNvPr id="20" name="TextBox 19"/>
@@ -7000,8 +7580,8 @@
         </p:nvSpPr>
         <p:spPr>
           <a:xfrm>
-            <a:off x="6934200" y="4705350"/>
-            <a:ext cx="4419600" cy="952500"/>
+            <a:off x="6705600" y="5524500"/>
+            <a:ext cx="4876800" cy="381000"/>
           </a:xfrm>
           <a:prstGeom prst="rect">
             <a:avLst/>
@@ -7016,37 +7596,30 @@
           <a:p>
             <a:pPr algn="l">
               <a:lnSpc>
-                <a:spcPct val="140000"/>
+                <a:spcPct val="130000"/>
               </a:lnSpc>
             </a:pPr>
             <a:r>
-              <a:rPr sz="1800" b="0">
-                <a:solidFill>
-                  <a:srgbClr val="FFFFFF"/>
+              <a:rPr sz="1200" b="1">
+                <a:solidFill>
+                  <a:srgbClr val="002C5F"/>
                 </a:solidFill>
                 <a:latin typeface="Pretendard"/>
                 <a:ea typeface="Pretendard"/>
                 <a:cs typeface="Pretendard"/>
               </a:rPr>
-              <a:t>두 차는 똑같이 미끄러진다.</a:t>
-            </a:r>
-          </a:p>
-          <a:p>
-            <a:pPr algn="l">
-              <a:lnSpc>
-                <a:spcPct val="140000"/>
-              </a:lnSpc>
-            </a:pPr>
-            <a:r>
-              <a:rPr sz="1800" b="1">
-                <a:solidFill>
-                  <a:srgbClr val="FFFFFF"/>
+              <a:t>다른 것은 제동을 시작하는 지점이다.</a:t>
+            </a:r>
+            <a:r>
+              <a:rPr sz="1200" b="0">
+                <a:solidFill>
+                  <a:srgbClr val="002C5F"/>
                 </a:solidFill>
                 <a:latin typeface="Pretendard"/>
                 <a:ea typeface="Pretendard"/>
                 <a:cs typeface="Pretendard"/>
               </a:rPr>
-              <a:t>다른 것은 제동을 시작하는 지점이다.</a:t>
+              <a:t> 회피 조향은 비교를 위해 매번 같게 자동, 브레이크는 사람.</a:t>
             </a:r>
           </a:p>
         </p:txBody>

--- a/sw/report/2026ESWContest_모빌리티_ARTS_결선발표.pptx
+++ b/sw/report/2026ESWContest_모빌리티_ARTS_결선발표.pptx
@@ -649,7 +649,7 @@
           <a:lstStyle/>
           <a:p>
             <a:r>
-              <a:t>[1:10–1:50] 그래서 두 겹으로 막습니다. 1차는 카메라로 미리 보고, 2차는 놓쳤을 때 노면을 재서 제동 시점을 고치고, 그 판단은 메인 컴퓨터와 분리된 안전 전용 RTOS에서 돕니다. 조향은 운전자 몫입니다.</a:t>
+              <a:t>[1:10–1:50] 그래서 두 겹으로 막습니다. 1차는 카메라로 미리 보고, 2차는 놓쳤을 때 노면을 재서 제동 시점을 고치고, 그 판단은 메인 컴퓨터와 분리된 안전 전용 RTOS 에서 돕니다. 조향은 운전자 몫이고, 시스템은 경고·가속 제한·제동만 돕습니다.</a:t>
             </a:r>
           </a:p>
         </p:txBody>
@@ -719,7 +719,7 @@
           <a:lstStyle/>
           <a:p>
             <a:r>
-              <a:t>[1:50–3:10] (시연 ① — venue_desktop.sh first) 실사진 69,358장을 보드에 넣어 블랙아이스 96.6 % 를 경보했고 마른 노면 오경보는 0.3 % 입니다. 지금 차가 80 km/h 로 달립니다. 화면 아래 '빙판까지 ○ m'가 150 m 이상일 때 RealSense 에 블랙아이스 사진을 비추면 — 경고, 빙판 앞 정지. (시간이 되면) 마른 노면 사진으로 한 판 더: 경고 없이 그대로 빙판에 들어가 충돌. 제동 여부는 RealSense 판정 하나로만 정합니다.</a:t>
+              <a:t>[1:50–3:10] (시연 ① 데스크톱 venue_desktop.sh first → 화면 아래 '빙판까지 ○ m'가 150 m 이상일 때 아이패드 블랙아이스 사진(대각선 줄무늬)을 RealSense 에 비춘다. 시간이 되면 마른 노면 사진으로 한 판 더.) 실제 도로 사진 69,358장을 STM32N6 보드에 넣어 쟀을 때 블랙아이스 96.6 % 를 경보했고 마른 노면 오경보는 0.3 % 입니다. 지금 시연은 보드가 없어 같은 모델을 라즈베리파이에서 돌립니다. 차가 80 km/h 로 달립니다 — RealSense 에 빙판 사진을 비추면 경고가 뜨고 빙판 앞에 섭니다. 마른 노면 사진이면 경고 없이 그대로 빙판에 들어가 미끄러집니다. 제동 여부는 RealSense 판정 하나로만 정합니다.</a:t>
             </a:r>
           </a:p>
         </p:txBody>
@@ -789,7 +789,7 @@
           <a:lstStyle/>
           <a:p>
             <a:r>
-              <a:t>[3:10–5:40] (시연 ② — venue_desktop.sh assist, D 로 OFF/ON) 카메라가 놓치면 2차 방어가 브레이크를 0.4 초 살짝 밟아 마찰을 잽니다. 빙판은 감속이 거기서 막히고 그 값이 마찰입니다. 그 마찰로 정지 거리를 다시 계산해 20 ms 마다 제동 시점을 정합니다. 먼저 말씀드립니다 — 같은 조건에서 비교하려고 회피 조향은 매번 똑같이 자동으로 넣었고, 브레이크는 제가 직접 밟습니다. 우리 시스템은 조향에 개입하지 않고 제동 시점만 바꿉니다. OFF: 빨간 선에서 밟고 피해도 빙판에서 미끄러져 충돌(연습 17 km/h). ON: 탭 → 진동·경고 → 미리 감속 → 같은 지점에서 밟고 피하면 정지(연습 34 m 앞).</a:t>
+              <a:t>[3:10–5:40] (시연 ② 데스크톱 venue_desktop.sh assist → D 로 OFF, 액셀 끝까지, 빨간 선 'BRAKE HERE'에서 브레이크(핸들은 따라 움직이기만). R 로 다시, D 로 ON 해서 같은 동작.) 카메라가 놓치면 2차 방어가 브레이크를 0.4 초 살짝 밟아 마찰을 잽니다. 빙판은 감속이 거기서 막히고 그 값이 마찰입니다. 그 마찰로 정지 거리를 다시 계산해 20 ms 마다 제동 시점을 정합니다. 먼저 말씀드립니다 — 같은 조건에서 비교하려고 회피 조향은 매번 똑같이 자동으로 넣었고, 브레이크는 제가 직접 밟습니다. 우리 시스템은 조향에 개입하지 않고 제동 시점만 바꿉니다. OFF: 빨간 선에서 밟고 피해도 빙판에서 미끄러져 충돌합니다. ON: 탭 → 진동·경고 → 미리 감속 → 같은 지점에서 밟고 피하면 섭니다.</a:t>
             </a:r>
           </a:p>
         </p:txBody>
@@ -859,7 +859,7 @@
           <a:lstStyle/>
           <a:p>
             <a:r>
-              <a:t>[5:30–6:30] 같은 C 코드에 마찰 값만 다르게 넣은 CARLA 비교입니다. 마른 노면 기준은 9회 중 2회만 섰고, 마찰 인식은 8회 섰으며 그중 7회는 목표대로 앞차 4 m 앞이었습니다.</a:t>
+              <a:t>[5:40–6:30] 같은 C 코드에 마찰 값만 다르게 넣은 CARLA 비교입니다. 마른 노면 기준은 9회 중 2회만 섰고, 마찰 인식은 8회 섰으며 그중 7회는 목표대로 앞차 4 m 앞이었습니다.</a:t>
             </a:r>
           </a:p>
         </p:txBody>
@@ -929,7 +929,7 @@
           <a:lstStyle/>
           <a:p>
             <a:r>
-              <a:t>[6:30–8:30] (시연 ③ — ② 의 ON 주행 중 빙판 경고 뒤 K 키) 2차 판단은 안전 전용 RTOS에서 돕니다. 곡선 빙판에서 파이를 멈추면 2차가 파이에 있을 때 53 km/h, 안전 전용 RTOS에 있을 때 39 km/h 로 충돌했습니다. 지금 주행 중에 파이 메인 프로그램을 실제로 죽여 보겠습니다. 정직하게 말씀드리면, 이번 확장은 보드가 없어 같은 C 코드를 파이 격리 코어에서 돌렸습니다.</a:t>
+              <a:t>[6:30–8:30] (시연 ③ CARLA 로 돌아가 R → 2차 방어 ON 으로 출발 → 빨간 배너 '빙판 감지 μ 0.21'이 뜨면 K. (파이 터미널에 '[pi_main] KILL 받음'이 찍힌다)) 2차 판단은 안전 전용 RTOS 에서 돕니다. 곡선 빙판에서 파이를 멈추면 2차가 파이에 있을 때 53 km/h, 안전 전용 RTOS 에 있을 때 39 km/h 로 충돌했습니다. 지금 파이의 메인 프로그램을 실제로 죽였습니다. 카메라 판단은 멈췄지만, 따로 떼어 둔 격리 코어의 2차 방어는 이미 잰 마찰로 계속 판단해서 차를 세웁니다. 정직하게 말씀드리면 보드가 없어 같은 C 코드를 파이 격리 코어에서 돌렸고, 리눅스 커널이 멈추면 같이 멈춥니다. 그래서 실차 설계는 별도의 안전 전용 칩(MCU)입니다.</a:t>
             </a:r>
           </a:p>
         </p:txBody>

--- a/sw/report/2026ESWContest_모빌리티_ARTS_결선발표.pptx
+++ b/sw/report/2026ESWContest_모빌리티_ARTS_결선발표.pptx
@@ -929,7 +929,7 @@
           <a:lstStyle/>
           <a:p>
             <a:r>
-              <a:t>[6:30–8:30] (시연 ③ CARLA 로 돌아가 R → 2차 방어 ON 으로 출발 → 빨간 배너 '빙판 감지 μ 0.21'이 뜨면 K. (파이 터미널에 '[pi_main] KILL 받음'이 찍힌다)) 2차 판단은 안전 전용 RTOS 에서 돕니다. 곡선 빙판에서 파이를 멈추면 2차가 파이에 있을 때 53 km/h, 안전 전용 RTOS 에 있을 때 39 km/h 로 충돌했습니다. 지금 파이의 메인 프로그램을 실제로 죽였습니다. 카메라 판단은 멈췄지만, 따로 떼어 둔 격리 코어의 2차 방어는 이미 잰 마찰로 계속 판단해서 차를 세웁니다. 정직하게 말씀드리면 보드가 없어 같은 C 코드를 파이 격리 코어에서 돌렸고, 리눅스 커널이 멈추면 같이 멈춥니다. 그래서 실차 설계는 별도의 안전 전용 칩(MCU)입니다.</a:t>
+              <a:t>[6:30–8:30] (시연 ③ CARLA 로 돌아가 R → 2차 방어 ON(패널 '파이 메인 프로그램: 동작' 초록 확인) → 출발 → 빨간 배너 '빙판 감지 μ 0.21'이 뜬 뒤에 K (전에 누르면 무시된다) → 빨간 선에서 브레이크 → 정지. 파이 터미널에 '[pi_main] KILL 받음'. 다음 판은 패널이 다시 초록(약 20 s)이 된 뒤.) 메인 컴퓨터는 카메라 AI, 지도, 통신처럼 무거운 일을 동시에 합니다. 그래서 소프트웨어 버그, 과부하, 업데이트 오류, 발열 같은 이유로 언제든 멈출 수 있습니다. 실제로 부하를 걸었을 때 일반 리눅스 프로그램은 최악 206 ms 까지 늦어졌습니다. 그래서 자동차는 브레이크 같은 안전 기능을 메인 컴퓨터에 맡기지 않습니다. 우리도 2차 방어 판단을 메인과 떼어 안전 전용 RTOS 에 두었습니다. 곡선 빙판에서 파이를 멈추면 2차가 파이에 있을 때 53 km/h, 안전 전용 RTOS 에 있을 때 39 km/h 로 충돌했습니다. 지금 보여 드리겠습니다. 빙판을 감지해 마찰을 잰 직후, 메인 프로그램을 실제로 강제 종료합니다. 파이와의 연결이 끊기는 게 아니라, 파이 안에서 카메라와 지도를 맡던 메인 프로그램만 죽습니다. 따로 떼어 둔 2차 방어는 심장박동이 끊긴 걸 0.1 초 안에 알아채고, 이미 잰 마찰만으로 끝까지 제동해 차를 세웁니다. 정직하게 말씀드리면 보드가 없어 같은 C 코드를 파이 격리 코어에서 돌렸고, 리눅스 커널이 통째로 멈추면 같이 멈춥니다. 그래서 실차 설계는 별도의 안전 전용 칩(MCU)입니다.</a:t>
             </a:r>
           </a:p>
         </p:txBody>

--- a/sw/report/2026ESWContest_모빌리티_ARTS_결선발표.pptx
+++ b/sw/report/2026ESWContest_모빌리티_ARTS_결선발표.pptx
@@ -719,7 +719,7 @@
           <a:lstStyle/>
           <a:p>
             <a:r>
-              <a:t>[1:50–3:10] (시연 ① 데스크톱 venue_desktop.sh first → 화면 아래 '빙판까지 ○ m'가 150 m 이상일 때 아이패드 블랙아이스 사진(대각선 줄무늬)을 RealSense 에 비춘다. 시간이 되면 마른 노면 사진으로 한 판 더.) 실제 도로 사진 69,358장을 STM32N6 보드에 넣어 쟀을 때 블랙아이스 96.6 % 를 경보했고 마른 노면 오경보는 0.3 % 입니다. 지금 시연은 보드가 없어 같은 모델을 라즈베리파이에서 돌립니다. 차가 80 km/h 로 달립니다 — RealSense 에 빙판 사진을 비추면 경고가 뜨고 빙판 앞에 섭니다. 마른 노면 사진이면 경고 없이 그대로 빙판에 들어가 미끄러집니다. 제동 여부는 RealSense 판정 하나로만 정합니다.</a:t>
+              <a:t>[1:50–3:10] (시연 ① 데스크톱 venue_desktop.sh first → 화면 아래 '빙판까지 ○ m'가 150 m 이상일 때 아이패드 블랙아이스 사진(대각선 줄무늬)을 RealSense 에 비춘다. 시간이 되면 마른 노면 사진으로 한 판 더.) 실제 도로 사진 69,358장을 STM32N6 보드에 넣어 쟀을 때 블랙아이스 96.6 % 를 경보했고 마른 노면 오경보는 0.3 % 입니다. 보드는 지금 다른 대회(F1TENTH, 일본)에 나가 있어 오늘 시연은 같은 모델을 라즈베리파이에서 돌립니다. 차가 80 km/h 로 달립니다 — RealSense 에 빙판 사진을 비추면 경고가 뜨고 빙판 앞에 섭니다. 마른 노면 사진이면 경고 없이 그대로 빙판에 들어가 미끄러집니다. 제동 여부는 RealSense 판정 하나로만 정합니다.</a:t>
             </a:r>
           </a:p>
         </p:txBody>
@@ -929,7 +929,7 @@
           <a:lstStyle/>
           <a:p>
             <a:r>
-              <a:t>[6:30–8:30] (시연 ③ CARLA 로 돌아가 R → 2차 방어 ON(패널 '파이 메인 프로그램: 동작' 초록 확인) → 출발 → 빨간 배너 '빙판 감지 μ 0.21'이 뜬 뒤에 K (전에 누르면 무시된다) → 빨간 선에서 브레이크 → 정지. 파이 터미널에 '[pi_main] KILL 받음'. 다음 판은 패널이 다시 초록(약 20 s)이 된 뒤.) 메인 컴퓨터는 카메라 AI, 지도, 통신처럼 무거운 일을 동시에 합니다. 그래서 소프트웨어 버그, 과부하, 업데이트 오류, 발열 같은 이유로 언제든 멈출 수 있습니다. 실제로 부하를 걸었을 때 일반 리눅스 프로그램은 최악 206 ms 까지 늦어졌습니다. 그래서 자동차는 브레이크 같은 안전 기능을 메인 컴퓨터에 맡기지 않습니다. 우리도 2차 방어 판단을 메인과 떼어 안전 전용 RTOS 에 두었습니다. 곡선 빙판에서 파이를 멈추면 2차가 파이에 있을 때 53 km/h, 안전 전용 RTOS 에 있을 때 39 km/h 로 충돌했습니다. 지금 보여 드리겠습니다. 빙판을 감지해 마찰을 잰 직후, 메인 프로그램을 실제로 강제 종료합니다. 파이와의 연결이 끊기는 게 아니라, 파이 안에서 카메라와 지도를 맡던 메인 프로그램만 죽습니다. 따로 떼어 둔 2차 방어는 심장박동이 끊긴 걸 0.1 초 안에 알아채고, 이미 잰 마찰만으로 끝까지 제동해 차를 세웁니다. 정직하게 말씀드리면 보드가 없어 같은 C 코드를 파이 격리 코어에서 돌렸고, 리눅스 커널이 통째로 멈추면 같이 멈춥니다. 그래서 실차 설계는 별도의 안전 전용 칩(MCU)입니다.</a:t>
+              <a:t>[6:30–8:30] (시연 ③ CARLA 로 돌아가 R → 2차 방어 ON(패널 '파이 메인 프로그램: 동작' 초록 확인) → 출발 → 빨간 배너 '빙판 감지 μ 0.21'이 뜬 뒤에 K (전에 누르면 무시된다) → 빨간 선에서 브레이크 → 정지. 파이 터미널에 '[pi_main] KILL 받음'. 다음 판은 패널이 다시 초록(약 20 s)이 된 뒤.) 메인 컴퓨터는 카메라 AI, 지도, 통신처럼 무거운 일을 동시에 합니다. 그래서 소프트웨어 버그, 과부하, 업데이트 오류, 발열 같은 이유로 언제든 멈출 수 있습니다. 실제로 부하를 걸었을 때 일반 리눅스 프로그램은 최악 206 ms 까지 늦어졌습니다. 그래서 자동차는 브레이크 같은 안전 기능을 메인 컴퓨터에 맡기지 않습니다. 우리도 2차 방어 판단을 메인과 떼어 안전 전용 RTOS 에 두었습니다. 곡선 빙판에서 파이를 멈추면 2차가 파이에 있을 때 53 km/h, 안전 전용 RTOS 에 있을 때 39 km/h 로 충돌했습니다. 지금 보여 드리겠습니다. 빙판을 감지해 마찰을 잰 직후, 메인 프로그램을 실제로 강제 종료합니다. 파이와의 연결이 끊기는 게 아니라, 파이 안에서 카메라와 지도를 맡던 메인 프로그램만 죽습니다. 따로 떼어 둔 2차 방어는 심장박동이 끊긴 걸 0.1 초 안에 알아채고, 이미 잰 마찰만으로 끝까지 제동해 차를 세웁니다. 정직하게 말씀드리면 STM32 보드는 연구실의 다른 대회(F1TENTH 레이싱, 일본) 장비로 나가 있어 같은 C 코드를 파이 격리 코어에서 돌렸고, 리눅스 커널이 통째로 멈추면 같이 멈춥니다. 그래서 실차 설계는 별도의 안전 전용 칩(MCU)입니다.</a:t>
             </a:r>
           </a:p>
         </p:txBody>

--- a/sw/report/2026ESWContest_모빌리티_ARTS_결선발표.pptx
+++ b/sw/report/2026ESWContest_모빌리티_ARTS_결선발표.pptx
@@ -719,7 +719,7 @@
           <a:lstStyle/>
           <a:p>
             <a:r>
-              <a:t>[1:50–3:10] (시연 ① 데스크톱 venue_desktop.sh first → 화면 아래 '빙판까지 ○ m'가 150 m 이상일 때 아이패드 블랙아이스 사진(대각선 줄무늬)을 RealSense 에 비춘다. 시간이 되면 마른 노면 사진으로 한 판 더.) 실제 도로 사진 69,358장을 STM32N6 보드에 넣어 쟀을 때 블랙아이스 96.6 % 를 경보했고 마른 노면 오경보는 0.3 % 입니다. 보드는 지금 다른 대회(F1TENTH, 일본)에 나가 있어 오늘 시연은 같은 모델을 라즈베리파이에서 돌립니다. 차가 80 km/h 로 달립니다 — RealSense 에 빙판 사진을 비추면 경고가 뜨고 빙판 앞에 섭니다. 마른 노면 사진이면 경고 없이 그대로 빙판에 들어가 미끄러집니다. 제동 여부는 RealSense 판정 하나로만 정합니다.</a:t>
+              <a:t>[1:50–3:10] (시연 ① 데스크톱 1 키(노면 판정): 아이패드로 마른·젖은·블랙아이스 사진을 차례로 비춰 확률이 맞게 나오는 걸 보여 준다 → 2 키(1차 주행): 화면 아래 '빙판까지 ○ m'가 150 m 이상일 때 블랙아이스 사진(대각선 줄무늬) → 빙판 앞 정지. 시간이 되면 2 키로 한 판 더, 이번엔 마른 노면 사진.) 실제 도로 사진 69,358장을 STM32N6 보드에 넣어 쟀을 때 블랙아이스 96.6 % 를 경보했고 마른 노면 오경보는 0.3 % 입니다. 보드는 지금 다른 대회(F1TENTH, 일본)에 나가 있어 오늘 시연은 같은 모델을 라즈베리파이에서 돌립니다. 차가 80 km/h 로 달립니다 — RealSense 에 빙판 사진을 비추면 경고가 뜨고 빙판 앞에 섭니다. 마른 노면 사진이면 경고 없이 그대로 빙판에 들어가 미끄러집니다. 제동 여부는 RealSense 판정 하나로만 정합니다.</a:t>
             </a:r>
           </a:p>
         </p:txBody>
@@ -789,7 +789,7 @@
           <a:lstStyle/>
           <a:p>
             <a:r>
-              <a:t>[3:10–5:40] (시연 ② 데스크톱 venue_desktop.sh assist → D 로 OFF, 액셀 끝까지, 빨간 선 'BRAKE HERE'에서 브레이크(핸들은 따라 움직이기만). R 로 다시, D 로 ON 해서 같은 동작.) 카메라가 놓치면 2차 방어가 브레이크를 0.4 초 살짝 밟아 마찰을 잽니다. 빙판은 감속이 거기서 막히고 그 값이 마찰입니다. 그 마찰로 정지 거리를 다시 계산해 20 ms 마다 제동 시점을 정합니다. 먼저 말씀드립니다 — 같은 조건에서 비교하려고 회피 조향은 매번 똑같이 자동으로 넣었고, 브레이크는 제가 직접 밟습니다. 우리 시스템은 조향에 개입하지 않고 제동 시점만 바꿉니다. OFF: 빨간 선에서 밟고 피해도 빙판에서 미끄러져 충돌합니다. ON: 탭 → 진동·경고 → 미리 감속 → 같은 지점에서 밟고 피하면 섭니다.</a:t>
+              <a:t>[3:10–5:40] (시연 ② 데스크톱 3 키(2차 방어) → D 로 OFF, 액셀 끝까지, 빨간 선 'BRAKE HERE'에서 브레이크(핸들은 따라 움직이기만). D 로 ON 해서 같은 동작.) 카메라가 놓치면 2차 방어가 브레이크를 0.4 초 살짝 밟아 마찰을 잽니다. 빙판은 감속이 거기서 막히고 그 값이 마찰입니다. 그 마찰로 정지 거리를 다시 계산해 20 ms 마다 제동 시점을 정합니다. 먼저 말씀드립니다 — 같은 조건에서 비교하려고 회피 조향은 매번 똑같이 자동으로 넣었고, 브레이크는 제가 직접 밟습니다. 우리 시스템은 조향에 개입하지 않고 제동 시점만 바꿉니다. OFF: 빨간 선에서 밟고 피해도 빙판에서 미끄러져 충돌합니다. ON: 탭 → 진동·경고 → 미리 감속 → 같은 지점에서 밟고 피하면 섭니다.</a:t>
             </a:r>
           </a:p>
         </p:txBody>
@@ -929,7 +929,7 @@
           <a:lstStyle/>
           <a:p>
             <a:r>
-              <a:t>[6:30–8:30] (시연 ③ CARLA 로 돌아가 R → 2차 방어 ON(패널 '파이 메인 프로그램: 동작' 초록 확인) → 출발 → 빨간 배너 '빙판 감지 μ 0.21'이 뜬 뒤에 K (전에 누르면 무시된다) → 빨간 선에서 브레이크 → 정지. 파이 터미널에 '[pi_main] KILL 받음'. 다음 판은 패널이 다시 초록(약 20 s)이 된 뒤.) 메인 컴퓨터는 카메라 AI, 지도, 통신처럼 무거운 일을 동시에 합니다. 그래서 소프트웨어 버그, 과부하, 업데이트 오류, 발열 같은 이유로 언제든 멈출 수 있습니다. 실제로 부하를 걸었을 때 일반 리눅스 프로그램은 최악 206 ms 까지 늦어졌습니다. 그래서 자동차는 브레이크 같은 안전 기능을 메인 컴퓨터에 맡기지 않습니다. 우리도 2차 방어 판단을 메인과 떼어 안전 전용 RTOS 에 두었습니다. 곡선 빙판에서 파이를 멈추면 2차가 파이에 있을 때 53 km/h, 안전 전용 RTOS 에 있을 때 39 km/h 로 충돌했습니다. 지금 보여 드리겠습니다. 빙판을 감지해 마찰을 잰 직후, 메인 프로그램을 실제로 강제 종료합니다. 파이와의 연결이 끊기는 게 아니라, 파이 안에서 카메라와 지도를 맡던 메인 프로그램만 죽습니다. 따로 떼어 둔 2차 방어는 심장박동이 끊긴 걸 0.1 초 안에 알아채고, 이미 잰 마찰만으로 끝까지 제동해 차를 세웁니다. 정직하게 말씀드리면 STM32 보드는 연구실의 다른 대회(F1TENTH 레이싱, 일본) 장비로 나가 있어 같은 C 코드를 파이 격리 코어에서 돌렸고, 리눅스 커널이 통째로 멈추면 같이 멈춥니다. 그래서 실차 설계는 별도의 안전 전용 칩(MCU)입니다.</a:t>
+              <a:t>[6:30–8:30] (시연 ③ CARLA 로 돌아가 3 키(또는 R) → 2차 방어 ON(패널 '파이 메인 프로그램: 동작' 초록 확인) → 출발 → 빨간 배너 '빙판 감지 μ 0.21'이 뜬 뒤에 K (전에 누르면 무시된다) → 빨간 선에서 브레이크 → 정지. 파이 터미널에 '[pi_main] KILL 받음'. 다음 판은 패널이 다시 초록(약 20 s)이 된 뒤.) 메인 컴퓨터는 카메라 AI, 지도, 통신처럼 무거운 일을 동시에 합니다. 그래서 소프트웨어 버그, 과부하, 업데이트 오류, 발열 같은 이유로 언제든 멈출 수 있습니다. 실제로 부하를 걸었을 때 일반 리눅스 프로그램은 최악 206 ms 까지 늦어졌습니다. 그래서 자동차는 브레이크 같은 안전 기능을 메인 컴퓨터에 맡기지 않습니다. 우리도 2차 방어 판단을 메인과 떼어 안전 전용 RTOS 에 두었습니다. 곡선 빙판에서 파이를 멈추면 2차가 파이에 있을 때 53 km/h, 안전 전용 RTOS 에 있을 때 39 km/h 로 충돌했습니다. 지금 보여 드리겠습니다. 빙판을 감지해 마찰을 잰 직후, 메인 프로그램을 실제로 강제 종료합니다. 파이와의 연결이 끊기는 게 아니라, 파이 안에서 카메라와 지도를 맡던 메인 프로그램만 죽습니다. 따로 떼어 둔 2차 방어는 심장박동이 끊긴 걸 0.1 초 안에 알아채고, 이미 잰 마찰만으로 끝까지 제동해 차를 세웁니다. 정직하게 말씀드리면 STM32 보드는 연구실의 다른 대회(F1TENTH 레이싱, 일본) 장비로 나가 있어 같은 C 코드를 파이 격리 코어에서 돌렸고, 리눅스 커널이 통째로 멈추면 같이 멈춥니다. 그래서 실차 설계는 별도의 안전 전용 칩(MCU)입니다.</a:t>
             </a:r>
           </a:p>
         </p:txBody>
